--- a/templates/8D Report.pptx
+++ b/templates/8D Report.pptx
@@ -64,10 +64,10 @@
         </a:solidFill>
         <a:effectLst/>
         <a:uFillTx/>
-        <a:latin typeface="Helvetica Neue Medium"/>
-        <a:ea typeface="Helvetica Neue Medium"/>
-        <a:cs typeface="Helvetica Neue Medium"/>
-        <a:sym typeface="Helvetica Neue Medium"/>
+        <a:latin typeface="+mj-lt"/>
+        <a:ea typeface="+mj-ea"/>
+        <a:cs typeface="+mj-cs"/>
+        <a:sym typeface="Helvetica Neue"/>
       </a:defRPr>
     </a:lvl1pPr>
     <a:lvl2pPr marL="0" marR="0" indent="0" algn="l" defTabSz="914400" rtl="0" fontAlgn="auto" latinLnBrk="0" hangingPunct="0">
@@ -94,10 +94,10 @@
         </a:solidFill>
         <a:effectLst/>
         <a:uFillTx/>
-        <a:latin typeface="Helvetica Neue Medium"/>
-        <a:ea typeface="Helvetica Neue Medium"/>
-        <a:cs typeface="Helvetica Neue Medium"/>
-        <a:sym typeface="Helvetica Neue Medium"/>
+        <a:latin typeface="+mj-lt"/>
+        <a:ea typeface="+mj-ea"/>
+        <a:cs typeface="+mj-cs"/>
+        <a:sym typeface="Helvetica Neue"/>
       </a:defRPr>
     </a:lvl2pPr>
     <a:lvl3pPr marL="0" marR="0" indent="0" algn="l" defTabSz="914400" rtl="0" fontAlgn="auto" latinLnBrk="0" hangingPunct="0">
@@ -124,10 +124,10 @@
         </a:solidFill>
         <a:effectLst/>
         <a:uFillTx/>
-        <a:latin typeface="Helvetica Neue Medium"/>
-        <a:ea typeface="Helvetica Neue Medium"/>
-        <a:cs typeface="Helvetica Neue Medium"/>
-        <a:sym typeface="Helvetica Neue Medium"/>
+        <a:latin typeface="+mj-lt"/>
+        <a:ea typeface="+mj-ea"/>
+        <a:cs typeface="+mj-cs"/>
+        <a:sym typeface="Helvetica Neue"/>
       </a:defRPr>
     </a:lvl3pPr>
     <a:lvl4pPr marL="0" marR="0" indent="0" algn="l" defTabSz="914400" rtl="0" fontAlgn="auto" latinLnBrk="0" hangingPunct="0">
@@ -154,10 +154,10 @@
         </a:solidFill>
         <a:effectLst/>
         <a:uFillTx/>
-        <a:latin typeface="Helvetica Neue Medium"/>
-        <a:ea typeface="Helvetica Neue Medium"/>
-        <a:cs typeface="Helvetica Neue Medium"/>
-        <a:sym typeface="Helvetica Neue Medium"/>
+        <a:latin typeface="+mj-lt"/>
+        <a:ea typeface="+mj-ea"/>
+        <a:cs typeface="+mj-cs"/>
+        <a:sym typeface="Helvetica Neue"/>
       </a:defRPr>
     </a:lvl4pPr>
     <a:lvl5pPr marL="0" marR="0" indent="0" algn="l" defTabSz="914400" rtl="0" fontAlgn="auto" latinLnBrk="0" hangingPunct="0">
@@ -184,10 +184,10 @@
         </a:solidFill>
         <a:effectLst/>
         <a:uFillTx/>
-        <a:latin typeface="Helvetica Neue Medium"/>
-        <a:ea typeface="Helvetica Neue Medium"/>
-        <a:cs typeface="Helvetica Neue Medium"/>
-        <a:sym typeface="Helvetica Neue Medium"/>
+        <a:latin typeface="+mj-lt"/>
+        <a:ea typeface="+mj-ea"/>
+        <a:cs typeface="+mj-cs"/>
+        <a:sym typeface="Helvetica Neue"/>
       </a:defRPr>
     </a:lvl5pPr>
     <a:lvl6pPr marL="0" marR="0" indent="0" algn="l" defTabSz="914400" rtl="0" fontAlgn="auto" latinLnBrk="0" hangingPunct="0">
@@ -214,10 +214,10 @@
         </a:solidFill>
         <a:effectLst/>
         <a:uFillTx/>
-        <a:latin typeface="Helvetica Neue Medium"/>
-        <a:ea typeface="Helvetica Neue Medium"/>
-        <a:cs typeface="Helvetica Neue Medium"/>
-        <a:sym typeface="Helvetica Neue Medium"/>
+        <a:latin typeface="+mj-lt"/>
+        <a:ea typeface="+mj-ea"/>
+        <a:cs typeface="+mj-cs"/>
+        <a:sym typeface="Helvetica Neue"/>
       </a:defRPr>
     </a:lvl6pPr>
     <a:lvl7pPr marL="0" marR="0" indent="0" algn="l" defTabSz="914400" rtl="0" fontAlgn="auto" latinLnBrk="0" hangingPunct="0">
@@ -244,10 +244,10 @@
         </a:solidFill>
         <a:effectLst/>
         <a:uFillTx/>
-        <a:latin typeface="Helvetica Neue Medium"/>
-        <a:ea typeface="Helvetica Neue Medium"/>
-        <a:cs typeface="Helvetica Neue Medium"/>
-        <a:sym typeface="Helvetica Neue Medium"/>
+        <a:latin typeface="+mj-lt"/>
+        <a:ea typeface="+mj-ea"/>
+        <a:cs typeface="+mj-cs"/>
+        <a:sym typeface="Helvetica Neue"/>
       </a:defRPr>
     </a:lvl7pPr>
     <a:lvl8pPr marL="0" marR="0" indent="0" algn="l" defTabSz="914400" rtl="0" fontAlgn="auto" latinLnBrk="0" hangingPunct="0">
@@ -274,10 +274,10 @@
         </a:solidFill>
         <a:effectLst/>
         <a:uFillTx/>
-        <a:latin typeface="Helvetica Neue Medium"/>
-        <a:ea typeface="Helvetica Neue Medium"/>
-        <a:cs typeface="Helvetica Neue Medium"/>
-        <a:sym typeface="Helvetica Neue Medium"/>
+        <a:latin typeface="+mj-lt"/>
+        <a:ea typeface="+mj-ea"/>
+        <a:cs typeface="+mj-cs"/>
+        <a:sym typeface="Helvetica Neue"/>
       </a:defRPr>
     </a:lvl8pPr>
     <a:lvl9pPr marL="0" marR="0" indent="0" algn="l" defTabSz="914400" rtl="0" fontAlgn="auto" latinLnBrk="0" hangingPunct="0">
@@ -304,10 +304,10 @@
         </a:solidFill>
         <a:effectLst/>
         <a:uFillTx/>
-        <a:latin typeface="Helvetica Neue Medium"/>
-        <a:ea typeface="Helvetica Neue Medium"/>
-        <a:cs typeface="Helvetica Neue Medium"/>
-        <a:sym typeface="Helvetica Neue Medium"/>
+        <a:latin typeface="+mj-lt"/>
+        <a:ea typeface="+mj-ea"/>
+        <a:cs typeface="+mj-cs"/>
+        <a:sym typeface="Helvetica Neue"/>
       </a:defRPr>
     </a:lvl9pPr>
   </p:defaultTextStyle>
@@ -868,8 +868,8 @@
         </p:nvSpPr>
         <p:spPr>
           <a:xfrm>
-            <a:off x="592919" y="880919"/>
-            <a:ext cx="23197682" cy="1"/>
+            <a:off x="592921" y="880919"/>
+            <a:ext cx="23197683" cy="4"/>
           </a:xfrm>
           <a:prstGeom prst="line">
             <a:avLst/>
@@ -881,7 +881,7 @@
           </a:ln>
         </p:spPr>
         <p:txBody>
-          <a:bodyPr lIns="0" tIns="0" rIns="0" bIns="0"/>
+          <a:bodyPr lIns="45718" tIns="45718" rIns="45718" bIns="45718"/>
           <a:lstStyle/>
           <a:p>
             <a:pPr/>
@@ -979,7 +979,7 @@
         </p:nvSpPr>
         <p:spPr>
           <a:xfrm>
-            <a:off x="12085566" y="13161559"/>
+            <a:off x="12085566" y="13161560"/>
             <a:ext cx="303108" cy="279401"/>
           </a:xfrm>
           <a:prstGeom prst="rect">
@@ -1124,8 +1124,8 @@
         </p:nvSpPr>
         <p:spPr>
           <a:xfrm>
-            <a:off x="14630400" y="12712700"/>
-            <a:ext cx="5689600" cy="736600"/>
+            <a:off x="17248749" y="12712700"/>
+            <a:ext cx="452905" cy="460979"/>
           </a:xfrm>
           <a:prstGeom prst="rect">
             <a:avLst/>
@@ -1175,7 +1175,7 @@
         <p:spPr>
           <a:xfrm>
             <a:off x="-95401" y="13391999"/>
-            <a:ext cx="24517082" cy="456841"/>
+            <a:ext cx="24517082" cy="456842"/>
           </a:xfrm>
           <a:prstGeom prst="rect">
             <a:avLst/>
@@ -1213,8 +1213,8 @@
         </p:nvSpPr>
         <p:spPr>
           <a:xfrm>
-            <a:off x="516960" y="1257119"/>
-            <a:ext cx="23315761" cy="1"/>
+            <a:off x="516957" y="1257119"/>
+            <a:ext cx="23315763" cy="4"/>
           </a:xfrm>
           <a:prstGeom prst="line">
             <a:avLst/>
@@ -1227,7 +1227,7 @@
           </a:ln>
         </p:spPr>
         <p:txBody>
-          <a:bodyPr lIns="0" tIns="0" rIns="0" bIns="0"/>
+          <a:bodyPr lIns="45718" tIns="45718" rIns="45718" bIns="45718"/>
           <a:lstStyle/>
           <a:p>
             <a:pPr/>
@@ -1241,8 +1241,8 @@
           <p:nvPr/>
         </p:nvGraphicFramePr>
         <p:xfrm>
-          <a:off x="57240" y="13373279"/>
-          <a:ext cx="35204760" cy="512641"/>
+          <a:off x="57240" y="13373278"/>
+          <a:ext cx="35204760" cy="512644"/>
         </p:xfrm>
         <a:graphic xmlns:a="http://schemas.openxmlformats.org/drawingml/2006/main">
           <a:graphicData uri="http://schemas.openxmlformats.org/drawingml/2006/table">
@@ -1261,9 +1261,9 @@
                     <a:bodyPr/>
                     <a:lstStyle/>
                     <a:p>
-                      <a:pPr algn="l" defTabSz="914400">
-                        <a:defRPr spc="0" sz="1800">
-                          <a:sym typeface="Helvetica Neue Medium"/>
+                      <a:pPr>
+                        <a:defRPr>
+                          <a:sym typeface="Helvetica"/>
                         </a:defRPr>
                       </a:pPr>
                     </a:p>
@@ -1454,7 +1454,7 @@
         </p:nvSpPr>
         <p:spPr>
           <a:xfrm>
-            <a:off x="11469722" y="9604840"/>
+            <a:off x="11469722" y="9604842"/>
             <a:ext cx="334556" cy="338720"/>
           </a:xfrm>
           <a:prstGeom prst="rect">
@@ -1513,7 +1513,7 @@
         <p:spPr>
           <a:xfrm>
             <a:off x="-95401" y="13391999"/>
-            <a:ext cx="24517082" cy="456841"/>
+            <a:ext cx="24517082" cy="456842"/>
           </a:xfrm>
           <a:prstGeom prst="rect">
             <a:avLst/>
@@ -1551,8 +1551,8 @@
         </p:nvSpPr>
         <p:spPr>
           <a:xfrm>
-            <a:off x="516960" y="1257119"/>
-            <a:ext cx="23315761" cy="361"/>
+            <a:off x="516957" y="1257119"/>
+            <a:ext cx="23315763" cy="364"/>
           </a:xfrm>
           <a:prstGeom prst="line">
             <a:avLst/>
@@ -1565,7 +1565,7 @@
           </a:ln>
         </p:spPr>
         <p:txBody>
-          <a:bodyPr lIns="0" tIns="0" rIns="0" bIns="0"/>
+          <a:bodyPr lIns="45718" tIns="45718" rIns="45718" bIns="45718"/>
           <a:lstStyle/>
           <a:p>
             <a:pPr/>
@@ -1579,8 +1579,8 @@
           <p:nvPr/>
         </p:nvGraphicFramePr>
         <p:xfrm>
-          <a:off x="57240" y="13373279"/>
-          <a:ext cx="24275161" cy="353521"/>
+          <a:off x="57240" y="13373278"/>
+          <a:ext cx="24275162" cy="353524"/>
         </p:xfrm>
         <a:graphic xmlns:a="http://schemas.openxmlformats.org/drawingml/2006/main">
           <a:graphicData uri="http://schemas.openxmlformats.org/drawingml/2006/table">
@@ -1801,8 +1801,8 @@
         </p:nvSpPr>
         <p:spPr>
           <a:xfrm>
-            <a:off x="12407980" y="13390418"/>
-            <a:ext cx="362800" cy="363383"/>
+            <a:off x="12407980" y="13390419"/>
+            <a:ext cx="362800" cy="363384"/>
           </a:xfrm>
           <a:prstGeom prst="rect">
             <a:avLst/>
@@ -1859,8 +1859,8 @@
         </p:nvSpPr>
         <p:spPr>
           <a:xfrm>
-            <a:off x="-88920" y="13398479"/>
-            <a:ext cx="27075960" cy="469441"/>
+            <a:off x="-88920" y="13398478"/>
+            <a:ext cx="27075960" cy="469444"/>
           </a:xfrm>
           <a:prstGeom prst="rect">
             <a:avLst/>
@@ -1895,8 +1895,8 @@
         </p:nvSpPr>
         <p:spPr>
           <a:xfrm>
-            <a:off x="516960" y="1244519"/>
-            <a:ext cx="23315761" cy="1"/>
+            <a:off x="516957" y="1244518"/>
+            <a:ext cx="23315763" cy="4"/>
           </a:xfrm>
           <a:prstGeom prst="line">
             <a:avLst/>
@@ -1909,7 +1909,7 @@
           </a:ln>
         </p:spPr>
         <p:txBody>
-          <a:bodyPr lIns="0" tIns="0" rIns="0" bIns="0"/>
+          <a:bodyPr lIns="45718" tIns="45718" rIns="45718" bIns="45718"/>
           <a:lstStyle/>
           <a:p>
             <a:pPr/>
@@ -1924,7 +1924,7 @@
         </p:nvGraphicFramePr>
         <p:xfrm>
           <a:off x="76320" y="13347720"/>
-          <a:ext cx="24291360" cy="365041"/>
+          <a:ext cx="24291361" cy="365044"/>
         </p:xfrm>
         <a:graphic xmlns:a="http://schemas.openxmlformats.org/drawingml/2006/main">
           <a:graphicData uri="http://schemas.openxmlformats.org/drawingml/2006/table">
@@ -1943,9 +1943,9 @@
                     <a:bodyPr/>
                     <a:lstStyle/>
                     <a:p>
-                      <a:pPr algn="l" defTabSz="914400">
-                        <a:defRPr spc="0" sz="1800">
-                          <a:sym typeface="Helvetica Neue Medium"/>
+                      <a:pPr>
+                        <a:defRPr>
+                          <a:sym typeface="Helvetica"/>
                         </a:defRPr>
                       </a:pPr>
                     </a:p>
@@ -2136,8 +2136,8 @@
         </p:nvSpPr>
         <p:spPr>
           <a:xfrm>
-            <a:off x="12482582" y="13373279"/>
-            <a:ext cx="283436" cy="287601"/>
+            <a:off x="12482582" y="13373278"/>
+            <a:ext cx="283436" cy="287600"/>
           </a:xfrm>
           <a:prstGeom prst="rect">
             <a:avLst/>
@@ -2197,7 +2197,7 @@
         <p:spPr>
           <a:xfrm>
             <a:off x="-95401" y="13391999"/>
-            <a:ext cx="24517082" cy="456841"/>
+            <a:ext cx="24517082" cy="456842"/>
           </a:xfrm>
           <a:prstGeom prst="rect">
             <a:avLst/>
@@ -2235,8 +2235,8 @@
         </p:nvSpPr>
         <p:spPr>
           <a:xfrm>
-            <a:off x="516960" y="1257119"/>
-            <a:ext cx="23315761" cy="361"/>
+            <a:off x="516957" y="1257119"/>
+            <a:ext cx="23315763" cy="364"/>
           </a:xfrm>
           <a:prstGeom prst="line">
             <a:avLst/>
@@ -2249,7 +2249,7 @@
           </a:ln>
         </p:spPr>
         <p:txBody>
-          <a:bodyPr lIns="0" tIns="0" rIns="0" bIns="0"/>
+          <a:bodyPr lIns="45718" tIns="45718" rIns="45718" bIns="45718"/>
           <a:lstStyle/>
           <a:p>
             <a:pPr/>
@@ -2263,8 +2263,8 @@
           <p:nvPr/>
         </p:nvGraphicFramePr>
         <p:xfrm>
-          <a:off x="57240" y="13373279"/>
-          <a:ext cx="24275161" cy="349201"/>
+          <a:off x="57240" y="13373278"/>
+          <a:ext cx="24275162" cy="349204"/>
         </p:xfrm>
         <a:graphic xmlns:a="http://schemas.openxmlformats.org/drawingml/2006/main">
           <a:graphicData uri="http://schemas.openxmlformats.org/drawingml/2006/table">
@@ -2476,8 +2476,8 @@
         </p:nvSpPr>
         <p:spPr>
           <a:xfrm>
-            <a:off x="12407980" y="13390418"/>
-            <a:ext cx="362800" cy="363383"/>
+            <a:off x="12407980" y="13390419"/>
+            <a:ext cx="362800" cy="363384"/>
           </a:xfrm>
           <a:prstGeom prst="rect">
             <a:avLst/>
@@ -2534,7 +2534,7 @@
         </p:nvSpPr>
         <p:spPr>
           <a:xfrm>
-            <a:off x="21313049" y="13372919"/>
+            <a:off x="21313049" y="13372918"/>
             <a:ext cx="3132031" cy="228601"/>
           </a:xfrm>
           <a:prstGeom prst="rect">
@@ -2592,8 +2592,8 @@
         </p:blipFill>
         <p:spPr>
           <a:xfrm>
-            <a:off x="943560" y="877679"/>
-            <a:ext cx="1320121" cy="1320121"/>
+            <a:off x="943560" y="877678"/>
+            <a:ext cx="1320124" cy="1320124"/>
           </a:xfrm>
           <a:prstGeom prst="rect">
             <a:avLst/>
@@ -2694,7 +2694,7 @@
         </p:nvSpPr>
         <p:spPr>
           <a:xfrm>
-            <a:off x="23966219" y="13042799"/>
+            <a:off x="23966220" y="13042799"/>
             <a:ext cx="325861" cy="330121"/>
           </a:xfrm>
           <a:prstGeom prst="rect">
@@ -2756,7 +2756,7 @@
         </p:nvSpPr>
         <p:spPr>
           <a:xfrm>
-            <a:off x="21313049" y="13372919"/>
+            <a:off x="21313049" y="13372918"/>
             <a:ext cx="3132031" cy="228601"/>
           </a:xfrm>
           <a:prstGeom prst="rect">
@@ -2804,8 +2804,8 @@
         </p:nvSpPr>
         <p:spPr>
           <a:xfrm>
-            <a:off x="214199" y="13372919"/>
-            <a:ext cx="19290962" cy="228601"/>
+            <a:off x="214198" y="13372918"/>
+            <a:ext cx="19290964" cy="228601"/>
           </a:xfrm>
           <a:prstGeom prst="rect">
             <a:avLst/>
@@ -2935,7 +2935,7 @@
         </p:nvSpPr>
         <p:spPr>
           <a:xfrm>
-            <a:off x="23963700" y="13042799"/>
+            <a:off x="23963702" y="13042799"/>
             <a:ext cx="325861" cy="330121"/>
           </a:xfrm>
           <a:prstGeom prst="rect">
@@ -3431,8 +3431,8 @@
         </p:nvSpPr>
         <p:spPr>
           <a:xfrm>
-            <a:off x="1201319" y="11859839"/>
-            <a:ext cx="21970801" cy="636481"/>
+            <a:off x="1201319" y="11859838"/>
+            <a:ext cx="21970802" cy="636484"/>
           </a:xfrm>
           <a:prstGeom prst="rect">
             <a:avLst/>
@@ -4281,8 +4281,8 @@
         </p:nvSpPr>
         <p:spPr>
           <a:xfrm>
-            <a:off x="6506999" y="431999"/>
-            <a:ext cx="11296441" cy="558721"/>
+            <a:off x="6506998" y="431999"/>
+            <a:ext cx="11296445" cy="558721"/>
           </a:xfrm>
           <a:prstGeom prst="rect">
             <a:avLst/>
@@ -4326,7 +4326,7 @@
         </p:nvGraphicFramePr>
         <p:xfrm>
           <a:off x="4064039" y="1439279"/>
-          <a:ext cx="16255801" cy="2966402"/>
+          <a:ext cx="16255802" cy="2966405"/>
         </p:xfrm>
         <a:graphic xmlns:a="http://schemas.openxmlformats.org/drawingml/2006/main">
           <a:graphicData uri="http://schemas.openxmlformats.org/drawingml/2006/table">
@@ -4344,7 +4344,7 @@
                     <a:lstStyle/>
                     <a:p>
                       <a:pPr algn="l">
-                        <a:defRPr sz="2000">
+                        <a:defRPr b="1">
                           <a:latin typeface="微軟正黑體"/>
                           <a:ea typeface="微軟正黑體"/>
                           <a:cs typeface="微軟正黑體"/>
@@ -4352,18 +4352,9 @@
                         </a:defRPr>
                       </a:pPr>
                       <a:r>
-                        <a:rPr sz="2400" b="1"/>
-                        <a:t>D1</a:t>
+                        <a:t>D1：Establish the Team</a:t>
                       </a:r>
-                      <a:r>
-                        <a:rPr sz="2400" b="1"/>
-                        <a:t>：</a:t>
-                      </a:r>
-                      <a:r>
-                        <a:rPr sz="2400" b="1"/>
-                        <a:t>Establish the Team</a:t>
-                      </a:r>
-                      <a:endParaRPr>
+                      <a:endParaRPr sz="2000">
                         <a:latin typeface="Arial"/>
                         <a:ea typeface="Arial"/>
                         <a:cs typeface="Arial"/>
@@ -4382,7 +4373,7 @@
                     </a:p>
                     <a:p>
                       <a:pPr algn="l">
-                        <a:defRPr sz="2000">
+                        <a:defRPr sz="1200">
                           <a:latin typeface="微軟正黑體"/>
                           <a:ea typeface="微軟正黑體"/>
                           <a:cs typeface="微軟正黑體"/>
@@ -4390,15 +4381,8 @@
                         </a:defRPr>
                       </a:pPr>
                       <a:r>
-                        <a:rPr sz="1200"/>
                         <a:t>{user input establish the team}</a:t>
                       </a:r>
-                      <a:endParaRPr>
-                        <a:latin typeface="Arial"/>
-                        <a:ea typeface="Arial"/>
-                        <a:cs typeface="Arial"/>
-                        <a:sym typeface="Arial"/>
-                      </a:endParaRPr>
                     </a:p>
                   </a:txBody>
                   <a:tcPr marL="45720" marR="45720" marT="45720" marB="45720" anchor="t" anchorCtr="0" horzOverflow="overflow">
@@ -4433,7 +4417,7 @@
                     <a:lstStyle/>
                     <a:p>
                       <a:pPr algn="l">
-                        <a:defRPr sz="2000">
+                        <a:defRPr b="1">
                           <a:latin typeface="微軟正黑體"/>
                           <a:ea typeface="微軟正黑體"/>
                           <a:cs typeface="微軟正黑體"/>
@@ -4441,18 +4425,9 @@
                         </a:defRPr>
                       </a:pPr>
                       <a:r>
-                        <a:rPr sz="2400" b="1"/>
-                        <a:t>D2</a:t>
+                        <a:t>D2：Describe the Problem</a:t>
                       </a:r>
-                      <a:r>
-                        <a:rPr sz="2400" b="1"/>
-                        <a:t>：</a:t>
-                      </a:r>
-                      <a:r>
-                        <a:rPr sz="2400" b="1"/>
-                        <a:t>Describe the Problem</a:t>
-                      </a:r>
-                      <a:endParaRPr>
+                      <a:endParaRPr sz="2000">
                         <a:latin typeface="Arial"/>
                         <a:ea typeface="Arial"/>
                         <a:cs typeface="Arial"/>
@@ -4471,7 +4446,7 @@
                     </a:p>
                     <a:p>
                       <a:pPr algn="l">
-                        <a:defRPr sz="2000">
+                        <a:defRPr sz="1200">
                           <a:latin typeface="微軟正黑體"/>
                           <a:ea typeface="微軟正黑體"/>
                           <a:cs typeface="微軟正黑體"/>
@@ -4479,15 +4454,8 @@
                         </a:defRPr>
                       </a:pPr>
                       <a:r>
-                        <a:rPr sz="1200"/>
                         <a:t>{user input description}</a:t>
                       </a:r>
-                      <a:endParaRPr>
-                        <a:latin typeface="Arial"/>
-                        <a:ea typeface="Arial"/>
-                        <a:cs typeface="Arial"/>
-                        <a:sym typeface="Arial"/>
-                      </a:endParaRPr>
                     </a:p>
                   </a:txBody>
                   <a:tcPr marL="45720" marR="45720" marT="45720" marB="45720" anchor="t" anchorCtr="0" horzOverflow="overflow">
@@ -4522,7 +4490,7 @@
                     <a:lstStyle/>
                     <a:p>
                       <a:pPr algn="l">
-                        <a:defRPr sz="2000">
+                        <a:defRPr b="1">
                           <a:latin typeface="微軟正黑體"/>
                           <a:ea typeface="微軟正黑體"/>
                           <a:cs typeface="微軟正黑體"/>
@@ -4530,18 +4498,9 @@
                         </a:defRPr>
                       </a:pPr>
                       <a:r>
-                        <a:rPr sz="2400" b="1"/>
-                        <a:t>D3</a:t>
+                        <a:t>D3：Containment Actions</a:t>
                       </a:r>
-                      <a:r>
-                        <a:rPr sz="2400" b="1"/>
-                        <a:t>：</a:t>
-                      </a:r>
-                      <a:r>
-                        <a:rPr sz="2400" b="1"/>
-                        <a:t>Containment Actions</a:t>
-                      </a:r>
-                      <a:endParaRPr>
+                      <a:endParaRPr sz="2000">
                         <a:latin typeface="Arial"/>
                         <a:ea typeface="Arial"/>
                         <a:cs typeface="Arial"/>
@@ -4550,7 +4509,7 @@
                     </a:p>
                     <a:p>
                       <a:pPr algn="l">
-                        <a:defRPr sz="2000">
+                        <a:defRPr sz="1200">
                           <a:latin typeface="微軟正黑體"/>
                           <a:ea typeface="微軟正黑體"/>
                           <a:cs typeface="微軟正黑體"/>
@@ -4558,10 +4517,9 @@
                         </a:defRPr>
                       </a:pPr>
                       <a:r>
-                        <a:rPr sz="1200"/>
                         <a:t>{Fill_in_predicted_containment}</a:t>
                       </a:r>
-                      <a:endParaRPr>
+                      <a:endParaRPr sz="2000">
                         <a:latin typeface="Arial"/>
                         <a:ea typeface="Arial"/>
                         <a:cs typeface="Arial"/>
@@ -4570,7 +4528,7 @@
                     </a:p>
                     <a:p>
                       <a:pPr algn="l">
-                        <a:defRPr sz="2000">
+                        <a:defRPr sz="1200">
                           <a:latin typeface="微軟正黑體"/>
                           <a:ea typeface="微軟正黑體"/>
                           <a:cs typeface="微軟正黑體"/>
@@ -4578,15 +4536,8 @@
                         </a:defRPr>
                       </a:pPr>
                       <a:r>
-                        <a:rPr sz="1200"/>
                         <a:t>{user input containment}</a:t>
                       </a:r>
-                      <a:endParaRPr>
-                        <a:latin typeface="Arial"/>
-                        <a:ea typeface="Arial"/>
-                        <a:cs typeface="Arial"/>
-                        <a:sym typeface="Arial"/>
-                      </a:endParaRPr>
                     </a:p>
                   </a:txBody>
                   <a:tcPr marL="45720" marR="45720" marT="45720" marB="45720" anchor="t" anchorCtr="0" horzOverflow="overflow">
@@ -4621,7 +4572,7 @@
                     <a:lstStyle/>
                     <a:p>
                       <a:pPr algn="l">
-                        <a:defRPr sz="2000">
+                        <a:defRPr b="1">
                           <a:latin typeface="微軟正黑體"/>
                           <a:ea typeface="微軟正黑體"/>
                           <a:cs typeface="微軟正黑體"/>
@@ -4629,18 +4580,9 @@
                         </a:defRPr>
                       </a:pPr>
                       <a:r>
-                        <a:rPr sz="2400" b="1"/>
-                        <a:t>D4</a:t>
+                        <a:t>D4：Root Cause Analysis</a:t>
                       </a:r>
-                      <a:r>
-                        <a:rPr sz="2400" b="1"/>
-                        <a:t>：</a:t>
-                      </a:r>
-                      <a:r>
-                        <a:rPr sz="2400" b="1"/>
-                        <a:t>Root Cause Analysis</a:t>
-                      </a:r>
-                      <a:endParaRPr>
+                      <a:endParaRPr sz="2000">
                         <a:latin typeface="Arial"/>
                         <a:ea typeface="Arial"/>
                         <a:cs typeface="Arial"/>
@@ -4649,7 +4591,7 @@
                     </a:p>
                     <a:p>
                       <a:pPr algn="l">
-                        <a:defRPr sz="2000">
+                        <a:defRPr sz="1200">
                           <a:latin typeface="微軟正黑體"/>
                           <a:ea typeface="微軟正黑體"/>
                           <a:cs typeface="微軟正黑體"/>
@@ -4657,10 +4599,9 @@
                         </a:defRPr>
                       </a:pPr>
                       <a:r>
-                        <a:rPr sz="1200"/>
                         <a:t>{Fill_in_predicted_causes}</a:t>
                       </a:r>
-                      <a:endParaRPr>
+                      <a:endParaRPr sz="2000">
                         <a:latin typeface="Arial"/>
                         <a:ea typeface="Arial"/>
                         <a:cs typeface="Arial"/>
@@ -4669,7 +4610,7 @@
                     </a:p>
                     <a:p>
                       <a:pPr algn="l">
-                        <a:defRPr sz="2000">
+                        <a:defRPr sz="1200">
                           <a:latin typeface="微軟正黑體"/>
                           <a:ea typeface="微軟正黑體"/>
                           <a:cs typeface="微軟正黑體"/>
@@ -4677,15 +4618,8 @@
                         </a:defRPr>
                       </a:pPr>
                       <a:r>
-                        <a:rPr sz="1200"/>
                         <a:t>{user input causes}</a:t>
                       </a:r>
-                      <a:endParaRPr>
-                        <a:latin typeface="Arial"/>
-                        <a:ea typeface="Arial"/>
-                        <a:cs typeface="Arial"/>
-                        <a:sym typeface="Arial"/>
-                      </a:endParaRPr>
                     </a:p>
                   </a:txBody>
                   <a:tcPr marL="45720" marR="45720" marT="45720" marB="45720" anchor="t" anchorCtr="0" horzOverflow="overflow">
@@ -4720,7 +4654,7 @@
                     <a:lstStyle/>
                     <a:p>
                       <a:pPr algn="l">
-                        <a:defRPr sz="2000">
+                        <a:defRPr b="1">
                           <a:latin typeface="微軟正黑體"/>
                           <a:ea typeface="微軟正黑體"/>
                           <a:cs typeface="微軟正黑體"/>
@@ -4728,18 +4662,9 @@
                         </a:defRPr>
                       </a:pPr>
                       <a:r>
-                        <a:rPr sz="2400" b="1"/>
-                        <a:t>D5</a:t>
+                        <a:t>D5：Corrective Actions</a:t>
                       </a:r>
-                      <a:r>
-                        <a:rPr sz="2400" b="1"/>
-                        <a:t>：</a:t>
-                      </a:r>
-                      <a:r>
-                        <a:rPr sz="2400" b="1"/>
-                        <a:t>Corrective Actions</a:t>
-                      </a:r>
-                      <a:endParaRPr>
+                      <a:endParaRPr sz="2000">
                         <a:latin typeface="Arial"/>
                         <a:ea typeface="Arial"/>
                         <a:cs typeface="Arial"/>
@@ -4758,7 +4683,7 @@
                     </a:p>
                     <a:p>
                       <a:pPr algn="l">
-                        <a:defRPr sz="2000">
+                        <a:defRPr sz="1200">
                           <a:latin typeface="微軟正黑體"/>
                           <a:ea typeface="微軟正黑體"/>
                           <a:cs typeface="微軟正黑體"/>
@@ -4766,15 +4691,8 @@
                         </a:defRPr>
                       </a:pPr>
                       <a:r>
-                        <a:rPr sz="1200"/>
                         <a:t>{Fill_in_list_of_corrective_actions}</a:t>
                       </a:r>
-                      <a:endParaRPr>
-                        <a:latin typeface="Arial"/>
-                        <a:ea typeface="Arial"/>
-                        <a:cs typeface="Arial"/>
-                        <a:sym typeface="Arial"/>
-                      </a:endParaRPr>
                     </a:p>
                   </a:txBody>
                   <a:tcPr marL="45720" marR="45720" marT="45720" marB="45720" anchor="t" anchorCtr="0" horzOverflow="overflow">
@@ -4809,7 +4727,7 @@
                     <a:lstStyle/>
                     <a:p>
                       <a:pPr algn="l">
-                        <a:defRPr sz="2000">
+                        <a:defRPr b="1">
                           <a:latin typeface="微軟正黑體"/>
                           <a:ea typeface="微軟正黑體"/>
                           <a:cs typeface="微軟正黑體"/>
@@ -4817,18 +4735,9 @@
                         </a:defRPr>
                       </a:pPr>
                       <a:r>
-                        <a:rPr sz="2400" b="1"/>
-                        <a:t>D6</a:t>
+                        <a:t>D6：Preventive Actions</a:t>
                       </a:r>
-                      <a:r>
-                        <a:rPr sz="2400" b="1"/>
-                        <a:t>：</a:t>
-                      </a:r>
-                      <a:r>
-                        <a:rPr sz="2400" b="1"/>
-                        <a:t>Preventive Actions</a:t>
-                      </a:r>
-                      <a:endParaRPr>
+                      <a:endParaRPr sz="2000">
                         <a:latin typeface="Arial"/>
                         <a:ea typeface="Arial"/>
                         <a:cs typeface="Arial"/>
@@ -4847,7 +4756,7 @@
                     </a:p>
                     <a:p>
                       <a:pPr algn="l">
-                        <a:defRPr sz="2000">
+                        <a:defRPr sz="1200">
                           <a:latin typeface="微軟正黑體"/>
                           <a:ea typeface="微軟正黑體"/>
                           <a:cs typeface="微軟正黑體"/>
@@ -4855,15 +4764,8 @@
                         </a:defRPr>
                       </a:pPr>
                       <a:r>
-                        <a:rPr sz="1200"/>
                         <a:t>{Fill_in_list_of_preventive_actions}</a:t>
                       </a:r>
-                      <a:endParaRPr>
-                        <a:latin typeface="Arial"/>
-                        <a:ea typeface="Arial"/>
-                        <a:cs typeface="Arial"/>
-                        <a:sym typeface="Arial"/>
-                      </a:endParaRPr>
                     </a:p>
                   </a:txBody>
                   <a:tcPr marL="45720" marR="45720" marT="45720" marB="45720" anchor="t" anchorCtr="0" horzOverflow="overflow">
@@ -4898,7 +4800,7 @@
                     <a:lstStyle/>
                     <a:p>
                       <a:pPr algn="l">
-                        <a:defRPr sz="2000">
+                        <a:defRPr b="1">
                           <a:latin typeface="微軟正黑體"/>
                           <a:ea typeface="微軟正黑體"/>
                           <a:cs typeface="微軟正黑體"/>
@@ -4906,18 +4808,9 @@
                         </a:defRPr>
                       </a:pPr>
                       <a:r>
-                        <a:rPr sz="2400" b="1"/>
-                        <a:t>D7</a:t>
+                        <a:t>D7：Effectiveness Verification</a:t>
                       </a:r>
-                      <a:r>
-                        <a:rPr sz="2400" b="1"/>
-                        <a:t>：</a:t>
-                      </a:r>
-                      <a:r>
-                        <a:rPr sz="2400" b="1"/>
-                        <a:t>Effectiveness Verification</a:t>
-                      </a:r>
-                      <a:endParaRPr>
+                      <a:endParaRPr sz="2000">
                         <a:latin typeface="Arial"/>
                         <a:ea typeface="Arial"/>
                         <a:cs typeface="Arial"/>
@@ -4926,7 +4819,7 @@
                     </a:p>
                     <a:p>
                       <a:pPr algn="l">
-                        <a:defRPr sz="2000">
+                        <a:defRPr sz="1200">
                           <a:latin typeface="微軟正黑體"/>
                           <a:ea typeface="微軟正黑體"/>
                           <a:cs typeface="微軟正黑體"/>
@@ -4934,25 +4827,8 @@
                         </a:defRPr>
                       </a:pPr>
                       <a:r>
-                        <a:rPr sz="1200"/>
                         <a:t>{Fill_in_verification}</a:t>
                       </a:r>
-                      <a:endParaRPr>
-                        <a:latin typeface="Arial"/>
-                        <a:ea typeface="Arial"/>
-                        <a:cs typeface="Arial"/>
-                        <a:sym typeface="Arial"/>
-                      </a:endParaRPr>
-                    </a:p>
-                    <a:p>
-                      <a:pPr algn="l">
-                        <a:defRPr sz="2000">
-                          <a:latin typeface="Arial"/>
-                          <a:ea typeface="Arial"/>
-                          <a:cs typeface="Arial"/>
-                          <a:sym typeface="Arial"/>
-                        </a:defRPr>
-                      </a:pPr>
                     </a:p>
                   </a:txBody>
                   <a:tcPr marL="45720" marR="45720" marT="45720" marB="45720" anchor="t" anchorCtr="0" horzOverflow="overflow">
@@ -4987,7 +4863,7 @@
                     <a:lstStyle/>
                     <a:p>
                       <a:pPr algn="l">
-                        <a:defRPr sz="2000">
+                        <a:defRPr b="1">
                           <a:latin typeface="微軟正黑體"/>
                           <a:ea typeface="微軟正黑體"/>
                           <a:cs typeface="微軟正黑體"/>
@@ -4995,18 +4871,9 @@
                         </a:defRPr>
                       </a:pPr>
                       <a:r>
-                        <a:rPr sz="2400" b="1"/>
-                        <a:t>D8</a:t>
+                        <a:t>D8：Congratulate the Team</a:t>
                       </a:r>
-                      <a:r>
-                        <a:rPr sz="2400" b="1"/>
-                        <a:t>：</a:t>
-                      </a:r>
-                      <a:r>
-                        <a:rPr sz="2400" b="1"/>
-                        <a:t>Congratulate the Team</a:t>
-                      </a:r>
-                      <a:endParaRPr>
+                      <a:endParaRPr sz="2000">
                         <a:latin typeface="Arial"/>
                         <a:ea typeface="Arial"/>
                         <a:cs typeface="Arial"/>
@@ -5015,7 +4882,7 @@
                     </a:p>
                     <a:p>
                       <a:pPr algn="l">
-                        <a:defRPr sz="2000">
+                        <a:defRPr sz="1200">
                           <a:latin typeface="微軟正黑體"/>
                           <a:ea typeface="微軟正黑體"/>
                           <a:cs typeface="微軟正黑體"/>
@@ -5023,15 +4890,8 @@
                         </a:defRPr>
                       </a:pPr>
                       <a:r>
-                        <a:rPr sz="1200"/>
                         <a:t>{user input congratulate}</a:t>
                       </a:r>
-                      <a:endParaRPr>
-                        <a:latin typeface="Arial"/>
-                        <a:ea typeface="Arial"/>
-                        <a:cs typeface="Arial"/>
-                        <a:sym typeface="Arial"/>
-                      </a:endParaRPr>
                     </a:p>
                   </a:txBody>
                   <a:tcPr marL="45720" marR="45720" marT="45720" marB="45720" anchor="t" anchorCtr="0" horzOverflow="overflow">
@@ -5097,8 +4957,8 @@
         </p:nvSpPr>
         <p:spPr>
           <a:xfrm>
-            <a:off x="1669305" y="501623"/>
-            <a:ext cx="1640841" cy="624841"/>
+            <a:off x="559457" y="452659"/>
+            <a:ext cx="1640841" cy="624837"/>
           </a:xfrm>
           <a:prstGeom prst="rect">
             <a:avLst/>
@@ -5113,12 +4973,17 @@
           </a:extLst>
         </p:spPr>
         <p:txBody>
-          <a:bodyPr lIns="45719" rIns="45719">
+          <a:bodyPr lIns="45718" tIns="45718" rIns="45718" bIns="45718">
             <a:spAutoFit/>
           </a:bodyPr>
           <a:lstStyle>
             <a:lvl1pPr>
-              <a:defRPr sz="3000"/>
+              <a:defRPr sz="3000">
+                <a:latin typeface="Helvetica Neue Medium"/>
+                <a:ea typeface="Helvetica Neue Medium"/>
+                <a:cs typeface="Helvetica Neue Medium"/>
+                <a:sym typeface="Helvetica Neue Medium"/>
+              </a:defRPr>
             </a:lvl1pPr>
           </a:lstStyle>
           <a:p>
@@ -5137,8 +5002,8 @@
         </p:nvSpPr>
         <p:spPr>
           <a:xfrm>
-            <a:off x="401319" y="7238999"/>
-            <a:ext cx="9624061" cy="277521"/>
+            <a:off x="642619" y="1714499"/>
+            <a:ext cx="9624061" cy="277517"/>
           </a:xfrm>
           <a:prstGeom prst="rect">
             <a:avLst/>
@@ -5153,12 +5018,17 @@
           </a:extLst>
         </p:spPr>
         <p:txBody>
-          <a:bodyPr lIns="45719" rIns="45719">
+          <a:bodyPr lIns="45718" tIns="45718" rIns="45718" bIns="45718">
             <a:spAutoFit/>
           </a:bodyPr>
           <a:lstStyle>
             <a:lvl1pPr>
-              <a:defRPr sz="1200"/>
+              <a:defRPr sz="1200">
+                <a:latin typeface="Helvetica Neue Medium"/>
+                <a:ea typeface="Helvetica Neue Medium"/>
+                <a:cs typeface="Helvetica Neue Medium"/>
+                <a:sym typeface="Helvetica Neue Medium"/>
+              </a:defRPr>
             </a:lvl1pPr>
           </a:lstStyle>
           <a:p>
@@ -5177,8 +5047,8 @@
         </p:nvSpPr>
         <p:spPr>
           <a:xfrm>
-            <a:off x="10777218" y="7238999"/>
-            <a:ext cx="11783067" cy="277521"/>
+            <a:off x="11671300" y="1739899"/>
+            <a:ext cx="11783067" cy="277517"/>
           </a:xfrm>
           <a:prstGeom prst="rect">
             <a:avLst/>
@@ -5193,12 +5063,17 @@
           </a:extLst>
         </p:spPr>
         <p:txBody>
-          <a:bodyPr lIns="45719" rIns="45719">
+          <a:bodyPr lIns="45718" tIns="45718" rIns="45718" bIns="45718">
             <a:spAutoFit/>
           </a:bodyPr>
           <a:lstStyle>
             <a:lvl1pPr>
-              <a:defRPr sz="1200"/>
+              <a:defRPr sz="1200">
+                <a:latin typeface="Helvetica Neue Medium"/>
+                <a:ea typeface="Helvetica Neue Medium"/>
+                <a:cs typeface="Helvetica Neue Medium"/>
+                <a:sym typeface="Helvetica Neue Medium"/>
+              </a:defRPr>
             </a:lvl1pPr>
           </a:lstStyle>
           <a:p>
@@ -5411,9 +5286,12 @@
         <a:solidFill>
           <a:srgbClr val="FFFFFF"/>
         </a:solidFill>
-        <a:ln w="12700" cap="flat">
-          <a:noFill/>
-          <a:miter lim="400000"/>
+        <a:ln w="25400" cap="flat">
+          <a:solidFill>
+            <a:schemeClr val="accent1"/>
+          </a:solidFill>
+          <a:prstDash val="solid"/>
+          <a:round/>
         </a:ln>
         <a:effectLst/>
         <a:sp3d/>
@@ -5446,10 +5324,10 @@
             </a:solidFill>
             <a:effectLst/>
             <a:uFillTx/>
-            <a:latin typeface="Helvetica Neue Medium"/>
-            <a:ea typeface="Helvetica Neue Medium"/>
-            <a:cs typeface="Helvetica Neue Medium"/>
-            <a:sym typeface="Helvetica Neue Medium"/>
+            <a:latin typeface="+mj-lt"/>
+            <a:ea typeface="+mj-ea"/>
+            <a:cs typeface="+mj-cs"/>
+            <a:sym typeface="Helvetica Neue"/>
           </a:defRPr>
         </a:defPPr>
         <a:lvl1pPr marL="0" marR="0" indent="0" algn="l" defTabSz="914400" rtl="0" fontAlgn="auto" latinLnBrk="1" hangingPunct="0">
@@ -5697,9 +5575,12 @@
     <a:lnDef>
       <a:spPr>
         <a:noFill/>
-        <a:ln w="12700" cap="flat">
-          <a:noFill/>
-          <a:miter lim="400000"/>
+        <a:ln w="25400" cap="flat">
+          <a:solidFill>
+            <a:schemeClr val="accent1"/>
+          </a:solidFill>
+          <a:prstDash val="solid"/>
+          <a:round/>
         </a:ln>
         <a:effectLst/>
         <a:sp3d/>
@@ -6014,10 +5895,10 @@
             </a:solidFill>
             <a:effectLst/>
             <a:uFillTx/>
-            <a:latin typeface="Helvetica Neue Medium"/>
-            <a:ea typeface="Helvetica Neue Medium"/>
-            <a:cs typeface="Helvetica Neue Medium"/>
-            <a:sym typeface="Helvetica Neue Medium"/>
+            <a:latin typeface="+mj-lt"/>
+            <a:ea typeface="+mj-ea"/>
+            <a:cs typeface="+mj-cs"/>
+            <a:sym typeface="Helvetica Neue"/>
           </a:defRPr>
         </a:defPPr>
         <a:lvl1pPr marL="0" marR="0" indent="0" algn="l" defTabSz="914400" rtl="0" fontAlgn="auto" latinLnBrk="1" hangingPunct="0">
@@ -6459,9 +6340,12 @@
         <a:solidFill>
           <a:srgbClr val="FFFFFF"/>
         </a:solidFill>
-        <a:ln w="12700" cap="flat">
-          <a:noFill/>
-          <a:miter lim="400000"/>
+        <a:ln w="25400" cap="flat">
+          <a:solidFill>
+            <a:schemeClr val="accent1"/>
+          </a:solidFill>
+          <a:prstDash val="solid"/>
+          <a:round/>
         </a:ln>
         <a:effectLst/>
         <a:sp3d/>
@@ -6494,10 +6378,10 @@
             </a:solidFill>
             <a:effectLst/>
             <a:uFillTx/>
-            <a:latin typeface="Helvetica Neue Medium"/>
-            <a:ea typeface="Helvetica Neue Medium"/>
-            <a:cs typeface="Helvetica Neue Medium"/>
-            <a:sym typeface="Helvetica Neue Medium"/>
+            <a:latin typeface="+mj-lt"/>
+            <a:ea typeface="+mj-ea"/>
+            <a:cs typeface="+mj-cs"/>
+            <a:sym typeface="Helvetica Neue"/>
           </a:defRPr>
         </a:defPPr>
         <a:lvl1pPr marL="0" marR="0" indent="0" algn="l" defTabSz="914400" rtl="0" fontAlgn="auto" latinLnBrk="1" hangingPunct="0">
@@ -6745,9 +6629,12 @@
     <a:lnDef>
       <a:spPr>
         <a:noFill/>
-        <a:ln w="12700" cap="flat">
-          <a:noFill/>
-          <a:miter lim="400000"/>
+        <a:ln w="25400" cap="flat">
+          <a:solidFill>
+            <a:schemeClr val="accent1"/>
+          </a:solidFill>
+          <a:prstDash val="solid"/>
+          <a:round/>
         </a:ln>
         <a:effectLst/>
         <a:sp3d/>
@@ -7062,10 +6949,10 @@
             </a:solidFill>
             <a:effectLst/>
             <a:uFillTx/>
-            <a:latin typeface="Helvetica Neue Medium"/>
-            <a:ea typeface="Helvetica Neue Medium"/>
-            <a:cs typeface="Helvetica Neue Medium"/>
-            <a:sym typeface="Helvetica Neue Medium"/>
+            <a:latin typeface="+mj-lt"/>
+            <a:ea typeface="+mj-ea"/>
+            <a:cs typeface="+mj-cs"/>
+            <a:sym typeface="Helvetica Neue"/>
           </a:defRPr>
         </a:defPPr>
         <a:lvl1pPr marL="0" marR="0" indent="0" algn="l" defTabSz="914400" rtl="0" fontAlgn="auto" latinLnBrk="1" hangingPunct="0">
